--- a/presentation/DataCon_Extraction_Agent_Presentation.pptx
+++ b/presentation/DataCon_Extraction_Agent_Presentation.pptx
@@ -2663,7 +2663,7 @@
                 <a:ea typeface="Aptos" pitchFamily="34" charset="-122"/>
                 <a:cs typeface="Aptos" pitchFamily="34" charset="-120"/>
               </a:rPr>
-              <a:t>Multi-agent extraction pipeline for chemistry PDFs</a:t>
+              <a:t>Помогает превратить научную PDF-статью в проверяемую таблицу</a:t>
             </a:r>
             <a:endParaRPr lang="en-US" sz="1500" dirty="0"/>
           </a:p>
@@ -2729,7 +2729,7 @@
                 <a:ea typeface="Aptos" pitchFamily="34" charset="-122"/>
                 <a:cs typeface="Aptos" pitchFamily="34" charset="-120"/>
               </a:rPr>
-              <a:t>PDF article</a:t>
+              <a:t>PDF-статья</a:t>
             </a:r>
             <a:endParaRPr lang="en-US" sz="1000" dirty="0"/>
           </a:p>
@@ -2822,7 +2822,7 @@
                 <a:ea typeface="Aptos" pitchFamily="34" charset="-122"/>
                 <a:cs typeface="Aptos" pitchFamily="34" charset="-120"/>
               </a:rPr>
-              <a:t>Agents</a:t>
+              <a:t>Агенты</a:t>
             </a:r>
             <a:endParaRPr lang="en-US" sz="1000" dirty="0"/>
           </a:p>
@@ -2915,7 +2915,7 @@
                 <a:ea typeface="Aptos" pitchFamily="34" charset="-122"/>
                 <a:cs typeface="Aptos" pitchFamily="34" charset="-120"/>
               </a:rPr>
-              <a:t>Validation</a:t>
+              <a:t>Проверка</a:t>
             </a:r>
             <a:endParaRPr lang="en-US" sz="1000" dirty="0"/>
           </a:p>
@@ -3008,7 +3008,7 @@
                 <a:ea typeface="Aptos" pitchFamily="34" charset="-122"/>
                 <a:cs typeface="Aptos" pitchFamily="34" charset="-120"/>
               </a:rPr>
-              <a:t>Clean CSV</a:t>
+              <a:t>Чистый CSV</a:t>
             </a:r>
             <a:endParaRPr lang="en-US" sz="1000" dirty="0"/>
           </a:p>
@@ -3140,7 +3140,7 @@
                 <a:ea typeface="Aptos" pitchFamily="34" charset="-122"/>
                 <a:cs typeface="Aptos" pitchFamily="34" charset="-120"/>
               </a:rPr>
-              <a:t>От PDF-статьи до проверяемой таблицы: Results, Evidence, Rejected, Conflicts, Vision и agent trace.</a:t>
+              <a:t>Берёт статью, находит в ней данные, проверяет их и показывает, откуда взялась каждая строка.</a:t>
             </a:r>
             <a:endParaRPr lang="en-US" sz="1050" dirty="0"/>
           </a:p>
@@ -3272,7 +3272,7 @@
                 <a:ea typeface="Aptos" pitchFamily="34" charset="-122"/>
                 <a:cs typeface="Aptos" pitchFamily="34" charset="-120"/>
               </a:rPr>
-              <a:t>LLM извлекает кандидатов, Python-валидаторы проверяют факты, UI показывает причину каждого решения.</a:t>
+              <a:t>Модель предлагает кандидатов, а валидаторы и интерфейс помогают понять: строке можно доверять или её нужно отклонить.</a:t>
             </a:r>
             <a:endParaRPr lang="en-US" sz="1050" dirty="0"/>
           </a:p>
@@ -3418,7 +3418,7 @@
                 <a:ea typeface="Aptos" pitchFamily="34" charset="-122"/>
                 <a:cs typeface="Aptos" pitchFamily="34" charset="-120"/>
               </a:rPr>
-              <a:t>VISION</a:t>
+              <a:t>ИЗОБРАЖЕНИЯ</a:t>
             </a:r>
             <a:endParaRPr lang="en-US" sz="850" dirty="0"/>
           </a:p>
@@ -3457,7 +3457,7 @@
                 <a:ea typeface="Aptos Display" pitchFamily="34" charset="-122"/>
                 <a:cs typeface="Aptos Display" pitchFamily="34" charset="-120"/>
               </a:rPr>
-              <a:t>Computer Vision слой</a:t>
+              <a:t>Что даёт компьютерное зрение</a:t>
             </a:r>
             <a:endParaRPr lang="en-US" sz="2300" dirty="0"/>
           </a:p>
@@ -3648,7 +3648,7 @@
                 <a:ea typeface="Aptos" pitchFamily="34" charset="-122"/>
                 <a:cs typeface="Aptos" pitchFamily="34" charset="-120"/>
               </a:rPr>
-              <a:t>Рендерит страницы, выделяет панели, ищет scale bar и оценивает размеры частиц по контурам.</a:t>
+              <a:t>Система смотрит на страницы статьи как на изображения: выделяет панели, ищет scale bar и оценивает размеры частиц.</a:t>
             </a:r>
             <a:endParaRPr lang="en-US" sz="1050" dirty="0"/>
           </a:p>
@@ -3741,7 +3741,7 @@
                 <a:ea typeface="Aptos" pitchFamily="34" charset="-122"/>
                 <a:cs typeface="Aptos" pitchFamily="34" charset="-120"/>
               </a:rPr>
-              <a:t>Как попадает в данные</a:t>
+              <a:t>Как это становится данными</a:t>
             </a:r>
             <a:endParaRPr lang="en-US" sz="1300" dirty="0"/>
           </a:p>
@@ -3780,7 +3780,7 @@
                 <a:ea typeface="Aptos" pitchFamily="34" charset="-122"/>
                 <a:cs typeface="Aptos" pitchFamily="34" charset="-120"/>
               </a:rPr>
-              <a:t>Если найден материал из текста, CV-измерение превращается в строку `particle diameter` с source_type=vision.</a:t>
+              <a:t>Если найден материал из текста, измерение с картинки добавляется как отдельная строка `particle diameter`.</a:t>
             </a:r>
             <a:endParaRPr lang="en-US" sz="1050" dirty="0"/>
           </a:p>
@@ -3846,7 +3846,7 @@
                 <a:ea typeface="Aptos" pitchFamily="34" charset="-122"/>
                 <a:cs typeface="Aptos" pitchFamily="34" charset="-120"/>
               </a:rPr>
-              <a:t>PDF page</a:t>
+              <a:t>страница</a:t>
             </a:r>
             <a:endParaRPr lang="en-US" sz="1000" dirty="0"/>
           </a:p>
@@ -3939,7 +3939,7 @@
                 <a:ea typeface="Aptos" pitchFamily="34" charset="-122"/>
                 <a:cs typeface="Aptos" pitchFamily="34" charset="-120"/>
               </a:rPr>
-              <a:t>panel crop</a:t>
+              <a:t>панель</a:t>
             </a:r>
             <a:endParaRPr lang="en-US" sz="1000" dirty="0"/>
           </a:p>
@@ -4125,7 +4125,7 @@
                 <a:ea typeface="Aptos" pitchFamily="34" charset="-122"/>
                 <a:cs typeface="Aptos" pitchFamily="34" charset="-120"/>
               </a:rPr>
-              <a:t>particles</a:t>
+              <a:t>частицы</a:t>
             </a:r>
             <a:endParaRPr lang="en-US" sz="1000" dirty="0"/>
           </a:p>
@@ -4218,7 +4218,7 @@
                 <a:ea typeface="Aptos" pitchFamily="34" charset="-122"/>
                 <a:cs typeface="Aptos" pitchFamily="34" charset="-120"/>
               </a:rPr>
-              <a:t>vision row</a:t>
+              <a:t>строка данных</a:t>
             </a:r>
             <a:endParaRPr lang="en-US" sz="1000" dirty="0"/>
           </a:p>
@@ -4257,7 +4257,7 @@
                 <a:ea typeface="Aptos" pitchFamily="34" charset="-122"/>
                 <a:cs typeface="Aptos" pitchFamily="34" charset="-120"/>
               </a:rPr>
-              <a:t>Если scale bar или material hint не найден, строка не теряется молча: она уходит в Rejected с причиной.</a:t>
+              <a:t>Если масштаба или материала не хватает, система не делает вид, что всё хорошо: строка уходит в Rejected с причиной.</a:t>
             </a:r>
             <a:endParaRPr lang="en-US" sz="1500" dirty="0"/>
           </a:p>
@@ -4364,7 +4364,7 @@
                 <a:ea typeface="Aptos" pitchFamily="34" charset="-122"/>
                 <a:cs typeface="Aptos" pitchFamily="34" charset="-120"/>
               </a:rPr>
-              <a:t>OUTPUT LOGIC</a:t>
+              <a:t>ЛОГИКА ВЫХОДА</a:t>
             </a:r>
             <a:endParaRPr lang="en-US" sz="850" dirty="0"/>
           </a:p>
@@ -4403,7 +4403,7 @@
                 <a:ea typeface="Aptos Display" pitchFamily="34" charset="-122"/>
                 <a:cs typeface="Aptos Display" pitchFamily="34" charset="-120"/>
               </a:rPr>
-              <a:t>Aggregation: чистый CSV</a:t>
+              <a:t>Как получается чистый CSV</a:t>
             </a:r>
             <a:endParaRPr lang="en-US" sz="2300" dirty="0"/>
           </a:p>
@@ -4555,7 +4555,7 @@
                 <a:ea typeface="Aptos" pitchFamily="34" charset="-122"/>
                 <a:cs typeface="Aptos" pitchFamily="34" charset="-120"/>
               </a:rPr>
-              <a:t>Deduplication</a:t>
+              <a:t>Убираем дубли</a:t>
             </a:r>
             <a:endParaRPr lang="en-US" sz="1300" dirty="0"/>
           </a:p>
@@ -4594,7 +4594,7 @@
                 <a:ea typeface="Aptos" pitchFamily="34" charset="-122"/>
                 <a:cs typeface="Aptos" pitchFamily="34" charset="-120"/>
               </a:rPr>
-              <a:t>Группировка по canonical SMILES/property или normalized formula/property/unit/assay/condition.</a:t>
+              <a:t>Одинаковые молекулы или материалы собираются вместе, чтобы в итоговой таблице не было повторов.</a:t>
             </a:r>
             <a:endParaRPr lang="en-US" sz="1050" dirty="0"/>
           </a:p>
@@ -4687,7 +4687,7 @@
                 <a:ea typeface="Aptos" pitchFamily="34" charset="-122"/>
                 <a:cs typeface="Aptos" pitchFamily="34" charset="-120"/>
               </a:rPr>
-              <a:t>Source priority</a:t>
+              <a:t>Выбираем надёжный источник</a:t>
             </a:r>
             <a:endParaRPr lang="en-US" sz="1300" dirty="0"/>
           </a:p>
@@ -4726,7 +4726,7 @@
                 <a:ea typeface="Aptos" pitchFamily="34" charset="-122"/>
                 <a:cs typeface="Aptos" pitchFamily="34" charset="-120"/>
               </a:rPr>
-              <a:t>Таблицы имеют приоритет над текстом; vision расположен между table и text.</a:t>
+              <a:t>Табличные значения обычно точнее текста, поэтому получают более высокий приоритет.</a:t>
             </a:r>
             <a:endParaRPr lang="en-US" sz="1050" dirty="0"/>
           </a:p>
@@ -4819,7 +4819,7 @@
                 <a:ea typeface="Aptos" pitchFamily="34" charset="-122"/>
                 <a:cs typeface="Aptos" pitchFamily="34" charset="-120"/>
               </a:rPr>
-              <a:t>Conflicts</a:t>
+              <a:t>Не прячем расхождения</a:t>
             </a:r>
             <a:endParaRPr lang="en-US" sz="1300" dirty="0"/>
           </a:p>
@@ -4858,7 +4858,7 @@
                 <a:ea typeface="Aptos" pitchFamily="34" charset="-122"/>
                 <a:cs typeface="Aptos" pitchFamily="34" charset="-120"/>
               </a:rPr>
-              <a:t>Если значения расходятся, выбранная строка идёт в Results, альтернативы попадают в Conflicts.</a:t>
+              <a:t>Если значения конфликтуют, выбранная строка идёт в Results, а альтернативы остаются в Conflicts.</a:t>
             </a:r>
             <a:endParaRPr lang="en-US" sz="1050" dirty="0"/>
           </a:p>
@@ -4924,7 +4924,7 @@
                 <a:ea typeface="Aptos" pitchFamily="34" charset="-122"/>
                 <a:cs typeface="Aptos" pitchFamily="34" charset="-120"/>
               </a:rPr>
-              <a:t>validated rows</a:t>
+              <a:t>проверенные строки</a:t>
             </a:r>
             <a:endParaRPr lang="en-US" sz="1000" dirty="0"/>
           </a:p>
@@ -5017,7 +5017,7 @@
                 <a:ea typeface="Aptos" pitchFamily="34" charset="-122"/>
                 <a:cs typeface="Aptos" pitchFamily="34" charset="-120"/>
               </a:rPr>
-              <a:t>normalize</a:t>
+              <a:t>нормализация</a:t>
             </a:r>
             <a:endParaRPr lang="en-US" sz="1000" dirty="0"/>
           </a:p>
@@ -5110,7 +5110,7 @@
                 <a:ea typeface="Aptos" pitchFamily="34" charset="-122"/>
                 <a:cs typeface="Aptos" pitchFamily="34" charset="-120"/>
               </a:rPr>
-              <a:t>sort priority</a:t>
+              <a:t>приоритет</a:t>
             </a:r>
             <a:endParaRPr lang="en-US" sz="1000" dirty="0"/>
           </a:p>
@@ -5203,7 +5203,7 @@
                 <a:ea typeface="Aptos" pitchFamily="34" charset="-122"/>
                 <a:cs typeface="Aptos" pitchFamily="34" charset="-120"/>
               </a:rPr>
-              <a:t>deduplicate</a:t>
+              <a:t>дедупликация</a:t>
             </a:r>
             <a:endParaRPr lang="en-US" sz="1000" dirty="0"/>
           </a:p>
@@ -5403,7 +5403,7 @@
                 <a:ea typeface="Aptos" pitchFamily="34" charset="-122"/>
                 <a:cs typeface="Aptos" pitchFamily="34" charset="-120"/>
               </a:rPr>
-              <a:t>TRUST</a:t>
+              <a:t>ДОВЕРИЕ</a:t>
             </a:r>
             <a:endParaRPr lang="en-US" sz="850" dirty="0"/>
           </a:p>
@@ -5442,7 +5442,7 @@
                 <a:ea typeface="Aptos Display" pitchFamily="34" charset="-122"/>
                 <a:cs typeface="Aptos Display" pitchFamily="34" charset="-120"/>
               </a:rPr>
-              <a:t>Quality score и evidence</a:t>
+              <a:t>Оценка качества и источник</a:t>
             </a:r>
             <a:endParaRPr lang="en-US" sz="2300" dirty="0"/>
           </a:p>
@@ -5633,7 +5633,7 @@
                 <a:ea typeface="Aptos" pitchFamily="34" charset="-122"/>
                 <a:cs typeface="Aptos" pitchFamily="34" charset="-120"/>
               </a:rPr>
-              <a:t>Численный индикатор 0-100. Учитывает источник, валидный идентификатор, unit, evidence и condition.</a:t>
+              <a:t>Быстрый ориентир 0-100: насколько строка выглядит надёжной по источнику, unit, evidence и валидному идентификатору.</a:t>
             </a:r>
             <a:endParaRPr lang="en-US" sz="1050" dirty="0"/>
           </a:p>
@@ -5765,7 +5765,7 @@
                 <a:ea typeface="Aptos" pitchFamily="34" charset="-122"/>
                 <a:cs typeface="Aptos" pitchFamily="34" charset="-120"/>
               </a:rPr>
-              <a:t>`from_table`, `from_text`, `from_vision`, `valid_formula`, `valid_smiles`, `has_unit`, `has_evidence`.</a:t>
+              <a:t>Короткие метки вроде `from_table`, `valid_formula`, `has_unit`, `has_evidence` объясняют, из чего сложился score.</a:t>
             </a:r>
             <a:endParaRPr lang="en-US" sz="1050" dirty="0"/>
           </a:p>
@@ -5858,7 +5858,7 @@
                 <a:ea typeface="Aptos" pitchFamily="34" charset="-122"/>
                 <a:cs typeface="Aptos" pitchFamily="34" charset="-120"/>
               </a:rPr>
-              <a:t>Evidence tab</a:t>
+              <a:t>Evidence</a:t>
             </a:r>
             <a:endParaRPr lang="en-US" sz="1300" dirty="0"/>
           </a:p>
@@ -5897,7 +5897,7 @@
                 <a:ea typeface="Aptos" pitchFamily="34" charset="-122"/>
                 <a:cs typeface="Aptos" pitchFamily="34" charset="-120"/>
               </a:rPr>
-              <a:t>Для каждой строки Results можно открыть полный фрагмент текста, из которого взято значение.</a:t>
+              <a:t>Для каждой принятой строки можно открыть полный фрагмент статьи, из которого взято значение.</a:t>
             </a:r>
             <a:endParaRPr lang="en-US" sz="1050" dirty="0"/>
           </a:p>
@@ -5990,7 +5990,7 @@
                 <a:ea typeface="Aptos" pitchFamily="34" charset="-122"/>
                 <a:cs typeface="Aptos" pitchFamily="34" charset="-120"/>
               </a:rPr>
-              <a:t>Rejected tab</a:t>
+              <a:t>Rejected</a:t>
             </a:r>
             <a:endParaRPr lang="en-US" sz="1300" dirty="0"/>
           </a:p>
@@ -6029,7 +6029,7 @@
                 <a:ea typeface="Aptos" pitchFamily="34" charset="-122"/>
                 <a:cs typeface="Aptos" pitchFamily="34" charset="-120"/>
               </a:rPr>
-              <a:t>Плохие строки не исчезают: сохраняются причина, валидатор, source_id и evidence.</a:t>
+              <a:t>Неподходящие строки не исчезают: сохраняются причина, валидатор и исходный фрагмент.</a:t>
             </a:r>
             <a:endParaRPr lang="en-US" sz="1050" dirty="0"/>
           </a:p>
@@ -6136,7 +6136,7 @@
                 <a:ea typeface="Aptos" pitchFamily="34" charset="-122"/>
                 <a:cs typeface="Aptos" pitchFamily="34" charset="-120"/>
               </a:rPr>
-              <a:t>STREAMLIT</a:t>
+              <a:t>ИНТЕРФЕЙС</a:t>
             </a:r>
             <a:endParaRPr lang="en-US" sz="850" dirty="0"/>
           </a:p>
@@ -6175,7 +6175,7 @@
                 <a:ea typeface="Aptos Display" pitchFamily="34" charset="-122"/>
                 <a:cs typeface="Aptos Display" pitchFamily="34" charset="-120"/>
               </a:rPr>
-              <a:t>UI: что видит пользователь</a:t>
+              <a:t>Что видит пользователь</a:t>
             </a:r>
             <a:endParaRPr lang="en-US" sz="2300" dirty="0"/>
           </a:p>
@@ -6274,7 +6274,7 @@
                 <a:ea typeface="Aptos" pitchFamily="34" charset="-122"/>
                 <a:cs typeface="Aptos" pitchFamily="34" charset="-120"/>
               </a:rPr>
-              <a:t>Sidebar: домен, PDF, extractor, Run, временные API-ключи.</a:t>
+              <a:t>Слева: домен, PDF, модель, запуск и временные API-ключи.</a:t>
             </a:r>
             <a:endParaRPr lang="en-US" sz="1350" dirty="0"/>
           </a:p>
@@ -6292,7 +6292,7 @@
                 <a:ea typeface="Aptos" pitchFamily="34" charset="-122"/>
                 <a:cs typeface="Aptos" pitchFamily="34" charset="-120"/>
               </a:rPr>
-              <a:t>Advanced: chunks, attempts, retrieval, model ids, vision pages, scale label.</a:t>
+              <a:t>В Advanced: размер контекста, число попыток, retrieval, модели и параметры vision.</a:t>
             </a:r>
             <a:endParaRPr lang="en-US" sz="1350" dirty="0"/>
           </a:p>
@@ -6310,7 +6310,7 @@
                 <a:ea typeface="Aptos" pitchFamily="34" charset="-122"/>
                 <a:cs typeface="Aptos" pitchFamily="34" charset="-120"/>
               </a:rPr>
-              <a:t>Main tabs: Results, Evidence, Rejected, Conflicts, Vision, Agents, Chunks, Log, Markdown.</a:t>
+              <a:t>В центре: Results, Evidence, Rejected, Conflicts, Vision, Agents, Chunks, Log, Markdown.</a:t>
             </a:r>
             <a:endParaRPr lang="en-US" sz="1350" dirty="0"/>
           </a:p>
@@ -6328,7 +6328,7 @@
                 <a:ea typeface="Aptos" pitchFamily="34" charset="-122"/>
                 <a:cs typeface="Aptos" pitchFamily="34" charset="-120"/>
               </a:rPr>
-              <a:t>Download-кнопки и локальные CSV-копии одинаковы на всех вкладках.</a:t>
+              <a:t>На каждой вкладке с таблицей есть download-кнопка и локальная CSV-копия.</a:t>
             </a:r>
             <a:endParaRPr lang="en-US" sz="1350" dirty="0"/>
           </a:p>
@@ -6421,7 +6421,7 @@
                 <a:ea typeface="Aptos" pitchFamily="34" charset="-122"/>
                 <a:cs typeface="Aptos" pitchFamily="34" charset="-120"/>
               </a:rPr>
-              <a:t>Design principle</a:t>
+              <a:t>Принцип интерфейса</a:t>
             </a:r>
             <a:endParaRPr lang="en-US" sz="1300" dirty="0"/>
           </a:p>
@@ -6460,7 +6460,7 @@
                 <a:ea typeface="Aptos" pitchFamily="34" charset="-122"/>
                 <a:cs typeface="Aptos" pitchFamily="34" charset="-120"/>
               </a:rPr>
-              <a:t>Максимум пользы на первом экране: таблица, статус и диагностика. Подробности доступны, но не мешают основному flow.</a:t>
+              <a:t>Пользователь сначала видит результат, а диагностика остаётся рядом: её легко открыть, но она не перегружает основной сценарий.</a:t>
             </a:r>
             <a:endParaRPr lang="en-US" sz="1050" dirty="0"/>
           </a:p>
@@ -6805,7 +6805,7 @@
                 <a:ea typeface="Aptos" pitchFamily="34" charset="-122"/>
                 <a:cs typeface="Aptos" pitchFamily="34" charset="-120"/>
               </a:rPr>
-              <a:t>Download CSV</a:t>
+              <a:t>CSV</a:t>
             </a:r>
             <a:endParaRPr lang="en-US" sz="1000" dirty="0"/>
           </a:p>
@@ -6912,7 +6912,7 @@
                 <a:ea typeface="Aptos" pitchFamily="34" charset="-122"/>
                 <a:cs typeface="Aptos" pitchFamily="34" charset="-120"/>
               </a:rPr>
-              <a:t>LLM CONNECTIVITY</a:t>
+              <a:t>МОДЕЛИ</a:t>
             </a:r>
             <a:endParaRPr lang="en-US" sz="850" dirty="0"/>
           </a:p>
@@ -7165,7 +7165,7 @@
                 <a:ea typeface="Aptos" pitchFamily="34" charset="-122"/>
                 <a:cs typeface="Aptos" pitchFamily="34" charset="-120"/>
               </a:rPr>
-              <a:t>Бесплатные/open-weight модели. Используется и для embeddings.</a:t>
+              <a:t>Подходит для open-weight моделей и embedding retrieval.</a:t>
             </a:r>
             <a:endParaRPr lang="en-US" sz="1050" dirty="0"/>
           </a:p>
@@ -7320,7 +7320,7 @@
                 <a:ea typeface="Aptos" pitchFamily="34" charset="-122"/>
                 <a:cs typeface="Aptos" pitchFamily="34" charset="-120"/>
               </a:rPr>
-              <a:t>OpenAI-compatible `chat.completions.create`. Работает для small molecules и Nanozymes.</a:t>
+              <a:t>Удобный единый вход к разным моделям. Работает и для малых молекул, и для наноматериалов.</a:t>
             </a:r>
             <a:endParaRPr lang="en-US" sz="1050" dirty="0"/>
           </a:p>
@@ -7475,7 +7475,7 @@
                 <a:ea typeface="Aptos" pitchFamily="34" charset="-122"/>
                 <a:cs typeface="Aptos" pitchFamily="34" charset="-120"/>
               </a:rPr>
-              <a:t>Подключён через structured `responses.parse`. Сейчас для small molecules.</a:t>
+              <a:t>Используется structured output. Сейчас включён для small-molecule сценария.</a:t>
             </a:r>
             <a:endParaRPr lang="en-US" sz="1050" dirty="0"/>
           </a:p>
@@ -7607,7 +7607,7 @@
                 <a:ea typeface="Aptos" pitchFamily="34" charset="-122"/>
                 <a:cs typeface="Aptos" pitchFamily="34" charset="-120"/>
               </a:rPr>
-              <a:t>Ключи можно вставить прямо в UI на один запуск, положить в `.env`, Streamlit secrets или системные переменные.</a:t>
+              <a:t>Ключ можно вставить в UI на один запуск или хранить в `.env`, Streamlit secrets либо системных переменных.</a:t>
             </a:r>
             <a:endParaRPr lang="en-US" sz="1050" dirty="0"/>
           </a:p>
@@ -7714,7 +7714,7 @@
                 <a:ea typeface="Aptos" pitchFamily="34" charset="-122"/>
                 <a:cs typeface="Aptos" pitchFamily="34" charset="-120"/>
               </a:rPr>
-              <a:t>REPRODUCIBILITY</a:t>
+              <a:t>ВОСПРОИЗВОДИМОСТЬ</a:t>
             </a:r>
             <a:endParaRPr lang="en-US" sz="850" dirty="0"/>
           </a:p>
@@ -8527,7 +8527,7 @@
                 <a:ea typeface="Aptos" pitchFamily="34" charset="-122"/>
                 <a:cs typeface="Aptos" pitchFamily="34" charset="-120"/>
               </a:rPr>
-              <a:t>Можно воспроизвести запуск, посмотреть параметры, выбранные чанки, ошибки extractors и итоговые таблицы.</a:t>
+              <a:t>Результат можно не только скачать, но и восстановить: параметры запуска, выбранные чанки, ошибки и итоговые таблицы лежат рядом.</a:t>
             </a:r>
             <a:endParaRPr lang="en-US" sz="1050" dirty="0"/>
           </a:p>
@@ -8634,7 +8634,7 @@
                 <a:ea typeface="Aptos" pitchFamily="34" charset="-122"/>
                 <a:cs typeface="Aptos" pitchFamily="34" charset="-120"/>
               </a:rPr>
-              <a:t>VALIDATION</a:t>
+              <a:t>ПРОВЕРКИ</a:t>
             </a:r>
             <a:endParaRPr lang="en-US" sz="850" dirty="0"/>
           </a:p>
@@ -8810,7 +8810,7 @@
                 <a:ea typeface="Aptos" pitchFamily="34" charset="-122"/>
                 <a:cs typeface="Aptos" pitchFamily="34" charset="-120"/>
               </a:rPr>
-              <a:t>tests OK</a:t>
+              <a:t>теста проходят</a:t>
             </a:r>
             <a:endParaRPr lang="en-US" sz="900" dirty="0"/>
           </a:p>
@@ -8888,7 +8888,7 @@
                 <a:ea typeface="Aptos" pitchFamily="34" charset="-122"/>
                 <a:cs typeface="Aptos" pitchFamily="34" charset="-120"/>
               </a:rPr>
-              <a:t>known secret leaks</a:t>
+              <a:t>секретов в файлах</a:t>
             </a:r>
             <a:endParaRPr lang="en-US" sz="900" dirty="0"/>
           </a:p>
@@ -8966,7 +8966,7 @@
                 <a:ea typeface="Aptos" pitchFamily="34" charset="-122"/>
                 <a:cs typeface="Aptos" pitchFamily="34" charset="-120"/>
               </a:rPr>
-              <a:t>deck slides</a:t>
+              <a:t>слайдов</a:t>
             </a:r>
             <a:endParaRPr lang="en-US" sz="900" dirty="0"/>
           </a:p>
@@ -9044,7 +9044,7 @@
                 <a:ea typeface="Aptos" pitchFamily="34" charset="-122"/>
                 <a:cs typeface="Aptos" pitchFamily="34" charset="-120"/>
               </a:rPr>
-              <a:t>local UI OK</a:t>
+              <a:t>UI отвечает</a:t>
             </a:r>
             <a:endParaRPr lang="en-US" sz="900" dirty="0"/>
           </a:p>
@@ -9084,7 +9084,7 @@
                 <a:ea typeface="Aptos" pitchFamily="34" charset="-122"/>
                 <a:cs typeface="Aptos" pitchFamily="34" charset="-120"/>
               </a:rPr>
-              <a:t>Unit tests покрывают extraction graph, nano validation, aggregation, retrieval, UI pipeline и CLI artifacts.</a:t>
+              <a:t>Тесты покрывают extraction graph, nano validation, aggregation, retrieval, UI pipeline и CLI artifacts.</a:t>
             </a:r>
             <a:endParaRPr lang="en-US" sz="1350" dirty="0"/>
           </a:p>
@@ -9102,7 +9102,7 @@
                 <a:ea typeface="Aptos" pitchFamily="34" charset="-122"/>
                 <a:cs typeface="Aptos" pitchFamily="34" charset="-120"/>
               </a:rPr>
-              <a:t>Секреты не коммитятся: `.env` в `.gitignore`, проверка regex перед push.</a:t>
+              <a:t>Секреты не коммитятся: `.env` в `.gitignore`, перед push проверяется отсутствие ключей в файлах.</a:t>
             </a:r>
             <a:endParaRPr lang="en-US" sz="1350" dirty="0"/>
           </a:p>
@@ -9227,7 +9227,7 @@
                 <a:ea typeface="Aptos" pitchFamily="34" charset="-122"/>
                 <a:cs typeface="Aptos" pitchFamily="34" charset="-120"/>
               </a:rPr>
-              <a:t>RESULT INTERPRETATION</a:t>
+              <a:t>РУЧНАЯ ПРОВЕРКА</a:t>
             </a:r>
             <a:endParaRPr lang="en-US" sz="850" dirty="0"/>
           </a:p>
@@ -9895,7 +9895,7 @@
                 <a:ea typeface="Aptos" pitchFamily="34" charset="-122"/>
                 <a:cs typeface="Aptos" pitchFamily="34" charset="-120"/>
               </a:rPr>
-              <a:t>Основная таблица: материал или SMILES, свойство, значение, единица измерения, source_type и quality_score.</a:t>
+              <a:t>То, что система считает готовым результатом: объект, свойство, значение, unit, источник и оценка качества.</a:t>
             </a:r>
             <a:endParaRPr lang="en-US" sz="1050" dirty="0"/>
           </a:p>
@@ -10027,7 +10027,7 @@
                 <a:ea typeface="Aptos" pitchFamily="34" charset="-122"/>
                 <a:cs typeface="Aptos" pitchFamily="34" charset="-120"/>
               </a:rPr>
-              <a:t>Проверочный слой: полный фрагмент текста, из которого была получена выбранная строка.</a:t>
+              <a:t>Фрагмент статьи, который помогает быстро проверить выбранную строку руками.</a:t>
             </a:r>
             <a:endParaRPr lang="en-US" sz="1050" dirty="0"/>
           </a:p>
@@ -10159,7 +10159,7 @@
                 <a:ea typeface="Aptos" pitchFamily="34" charset="-122"/>
                 <a:cs typeface="Aptos" pitchFamily="34" charset="-120"/>
               </a:rPr>
-              <a:t>Контроль качества: строки, которые модель нашла, но схема, формула, unit или sanity-check их отклонили.</a:t>
+              <a:t>То, что модель предложила, но система не пропустила из-за схемы, формулы, unit или sanity-check.</a:t>
             </a:r>
             <a:endParaRPr lang="en-US" sz="1050" dirty="0"/>
           </a:p>
@@ -10291,7 +10291,7 @@
                 <a:ea typeface="Aptos" pitchFamily="34" charset="-122"/>
                 <a:cs typeface="Aptos" pitchFamily="34" charset="-120"/>
               </a:rPr>
-              <a:t>Conflicts показывают расхождения значений, Agents объясняет путь данных через этапы pipeline.</a:t>
+              <a:t>Conflicts показывают спорные значения, Agents объясняет, через какие этапы прошла статья.</a:t>
             </a:r>
             <a:endParaRPr lang="en-US" sz="1050" dirty="0"/>
           </a:p>
@@ -10398,7 +10398,7 @@
                 <a:ea typeface="Aptos" pitchFamily="34" charset="-122"/>
                 <a:cs typeface="Aptos" pitchFamily="34" charset="-120"/>
               </a:rPr>
-              <a:t>RISKS</a:t>
+              <a:t>РИСКИ</a:t>
             </a:r>
             <a:endParaRPr lang="en-US" sz="850" dirty="0"/>
           </a:p>
@@ -10628,7 +10628,7 @@
                 <a:ea typeface="Aptos" pitchFamily="34" charset="-122"/>
                 <a:cs typeface="Aptos" pitchFamily="34" charset="-120"/>
               </a:rPr>
-              <a:t>Сложные PDF и отсутствие Ghostscript могут снижать качество таблиц. Есть fallback, но не магия.</a:t>
+              <a:t>Сложные PDF и отсутствие Ghostscript могут ухудшать таблицы. Есть fallback, но качество источника всё равно важно.</a:t>
             </a:r>
             <a:endParaRPr lang="en-US" sz="1050" dirty="0"/>
           </a:p>
@@ -10760,7 +10760,7 @@
                 <a:ea typeface="Aptos" pitchFamily="34" charset="-122"/>
                 <a:cs typeface="Aptos" pitchFamily="34" charset="-120"/>
               </a:rPr>
-              <a:t>HF/OpenRouter модели могут возвращать неполные поля. Сейчас такие строки попадают в Rejected.</a:t>
+              <a:t>Модели иногда возвращают неполные поля. Такие строки не попадают в clean CSV молча, а уходят в Rejected.</a:t>
             </a:r>
             <a:endParaRPr lang="en-US" sz="1050" dirty="0"/>
           </a:p>
@@ -10892,7 +10892,7 @@
                 <a:ea typeface="Aptos" pitchFamily="34" charset="-122"/>
                 <a:cs typeface="Aptos" pitchFamily="34" charset="-120"/>
               </a:rPr>
-              <a:t>CV зависит от качества страниц, scale bar и material hint. Ошибки явно логируются.</a:t>
+              <a:t>CV зависит от качества изображений, scale bar и связи картинки с материалом из текста.</a:t>
             </a:r>
             <a:endParaRPr lang="en-US" sz="1050" dirty="0"/>
           </a:p>
@@ -11024,7 +11024,7 @@
                 <a:ea typeface="Aptos" pitchFamily="34" charset="-122"/>
                 <a:cs typeface="Aptos" pitchFamily="34" charset="-120"/>
               </a:rPr>
-              <a:t>Evidence, rejected rows, conflicts, agent trace, tests и воспроизводимые artifacts делают ошибки видимыми.</a:t>
+              <a:t>Evidence, отклонённые строки, конфликты, путь агентов и тесты делают ошибки видимыми и проверяемыми.</a:t>
             </a:r>
             <a:endParaRPr lang="en-US" sz="1050" dirty="0"/>
           </a:p>
@@ -11131,7 +11131,7 @@
                 <a:ea typeface="Aptos" pitchFamily="34" charset="-122"/>
                 <a:cs typeface="Aptos" pitchFamily="34" charset="-120"/>
               </a:rPr>
-              <a:t>ROADMAP</a:t>
+              <a:t>ДАЛЬШЕ</a:t>
             </a:r>
             <a:endParaRPr lang="en-US" sz="850" dirty="0"/>
           </a:p>
@@ -11170,7 +11170,7 @@
                 <a:ea typeface="Aptos Display" pitchFamily="34" charset="-122"/>
                 <a:cs typeface="Aptos Display" pitchFamily="34" charset="-120"/>
               </a:rPr>
-              <a:t>Следующие улучшения</a:t>
+              <a:t>Что можно усилить дальше</a:t>
             </a:r>
             <a:endParaRPr lang="en-US" sz="2300" dirty="0"/>
           </a:p>
@@ -11361,7 +11361,7 @@
                 <a:ea typeface="Aptos" pitchFamily="34" charset="-122"/>
                 <a:cs typeface="Aptos" pitchFamily="34" charset="-120"/>
               </a:rPr>
-              <a:t>Загрузка эталонного CSV, precision/recall/F1, missed/extra rows.</a:t>
+              <a:t>Загрузить эталонный CSV и сразу видеть precision, recall, F1, missed и extra rows.</a:t>
             </a:r>
             <a:endParaRPr lang="en-US" sz="1050" dirty="0"/>
           </a:p>
@@ -11454,7 +11454,7 @@
                 <a:ea typeface="Aptos" pitchFamily="34" charset="-122"/>
                 <a:cs typeface="Aptos" pitchFamily="34" charset="-120"/>
               </a:rPr>
-              <a:t>Better repair</a:t>
+              <a:t>Автовосстановление</a:t>
             </a:r>
             <a:endParaRPr lang="en-US" sz="1300" dirty="0"/>
           </a:p>
@@ -11493,7 +11493,7 @@
                 <a:ea typeface="Aptos" pitchFamily="34" charset="-122"/>
                 <a:cs typeface="Aptos" pitchFamily="34" charset="-120"/>
               </a:rPr>
-              <a:t>Автоматически восстанавливать пустые formula/unit из evidence и соседних строк.</a:t>
+              <a:t>Пытаться восстанавливать пустые formula или unit из evidence и соседних строк, прежде чем отправлять строку в Rejected.</a:t>
             </a:r>
             <a:endParaRPr lang="en-US" sz="1050" dirty="0"/>
           </a:p>
@@ -11625,7 +11625,7 @@
                 <a:ea typeface="Aptos" pitchFamily="34" charset="-122"/>
                 <a:cs typeface="Aptos" pitchFamily="34" charset="-120"/>
               </a:rPr>
-              <a:t>Добавить альтернативный рендер PDF, если PDFium падает.</a:t>
+              <a:t>Добавить второй способ рендера PDF, если основной CV-путь не смог открыть документ.</a:t>
             </a:r>
             <a:endParaRPr lang="en-US" sz="1050" dirty="0"/>
           </a:p>
@@ -11718,7 +11718,7 @@
                 <a:ea typeface="Aptos" pitchFamily="34" charset="-122"/>
                 <a:cs typeface="Aptos" pitchFamily="34" charset="-120"/>
               </a:rPr>
-              <a:t>Provider presets</a:t>
+              <a:t>Профили моделей</a:t>
             </a:r>
             <a:endParaRPr lang="en-US" sz="1300" dirty="0"/>
           </a:p>
@@ -11757,7 +11757,7 @@
                 <a:ea typeface="Aptos" pitchFamily="34" charset="-122"/>
                 <a:cs typeface="Aptos" pitchFamily="34" charset="-120"/>
               </a:rPr>
-              <a:t>Готовые профили моделей: free/fast/accurate, чтобы пользователю не вводить model id руками.</a:t>
+              <a:t>Сделать готовые режимы: free, fast, accurate, чтобы не вводить model id вручную.</a:t>
             </a:r>
             <a:endParaRPr lang="en-US" sz="1050" dirty="0"/>
           </a:p>
@@ -11850,7 +11850,7 @@
                 <a:ea typeface="Aptos" pitchFamily="34" charset="-122"/>
                 <a:cs typeface="Aptos" pitchFamily="34" charset="-120"/>
               </a:rPr>
-              <a:t>Report export</a:t>
+              <a:t>Единый отчёт</a:t>
             </a:r>
             <a:endParaRPr lang="en-US" sz="1300" dirty="0"/>
           </a:p>
@@ -11889,7 +11889,7 @@
                 <a:ea typeface="Aptos" pitchFamily="34" charset="-122"/>
                 <a:cs typeface="Aptos" pitchFamily="34" charset="-120"/>
               </a:rPr>
-              <a:t>Единый HTML/Markdown отчет: Results + Evidence + Agents + Manifest.</a:t>
+              <a:t>Экспортировать HTML/Markdown-отчёт: Results, Evidence, Agents, Manifest и предупреждения.</a:t>
             </a:r>
             <a:endParaRPr lang="en-US" sz="1050" dirty="0"/>
           </a:p>
@@ -11982,7 +11982,7 @@
                 <a:ea typeface="Aptos" pitchFamily="34" charset="-122"/>
                 <a:cs typeface="Aptos" pitchFamily="34" charset="-120"/>
               </a:rPr>
-              <a:t>More domains</a:t>
+              <a:t>Больше доменов</a:t>
             </a:r>
             <a:endParaRPr lang="en-US" sz="1300" dirty="0"/>
           </a:p>
@@ -12021,7 +12021,7 @@
                 <a:ea typeface="Aptos" pitchFamily="34" charset="-122"/>
                 <a:cs typeface="Aptos" pitchFamily="34" charset="-120"/>
               </a:rPr>
-              <a:t>Расширить правила и схемы под другие предметные домены и типы статей.</a:t>
+              <a:t>Расширить правила и схемы под другие предметные области и типы статей.</a:t>
             </a:r>
             <a:endParaRPr lang="en-US" sz="1050" dirty="0"/>
           </a:p>
@@ -12128,7 +12128,7 @@
                 <a:ea typeface="Aptos" pitchFamily="34" charset="-122"/>
                 <a:cs typeface="Aptos" pitchFamily="34" charset="-120"/>
               </a:rPr>
-              <a:t>PROJECT SUMMARY</a:t>
+              <a:t>ИТОГ ПРОЕКТА</a:t>
             </a:r>
             <a:endParaRPr lang="en-US" sz="850" dirty="0"/>
           </a:p>
@@ -12167,7 +12167,7 @@
                 <a:ea typeface="Aptos Display" pitchFamily="34" charset="-122"/>
                 <a:cs typeface="Aptos Display" pitchFamily="34" charset="-120"/>
               </a:rPr>
-              <a:t>Один слайд: что построено</a:t>
+              <a:t>Что получилось</a:t>
             </a:r>
             <a:endParaRPr lang="en-US" sz="2300" dirty="0"/>
           </a:p>
@@ -12358,7 +12358,7 @@
                 <a:ea typeface="Aptos" pitchFamily="34" charset="-122"/>
                 <a:cs typeface="Aptos" pitchFamily="34" charset="-120"/>
               </a:rPr>
-              <a:t>Сделать локальный инструмент, который превращает научную PDF-статью в проверяемый CSV для DataCon-задач извлечения данных.</a:t>
+              <a:t>Локальный инструмент, который превращает сложную научную статью в понятный и проверяемый CSV.</a:t>
             </a:r>
             <a:endParaRPr lang="en-US" sz="1050" dirty="0"/>
           </a:p>
@@ -12490,7 +12490,7 @@
                 <a:ea typeface="Aptos" pitchFamily="34" charset="-122"/>
                 <a:cs typeface="Aptos" pitchFamily="34" charset="-120"/>
               </a:rPr>
-              <a:t>Multi-agent pipeline: parsing, retrieval, extraction, validation, vision, aggregation и quality scoring.</a:t>
+              <a:t>Несколько специализированных агентов: читают PDF, выбирают контекст, извлекают строки, проверяют и собирают результат.</a:t>
             </a:r>
             <a:endParaRPr lang="en-US" sz="1050" dirty="0"/>
           </a:p>
@@ -12622,7 +12622,7 @@
                 <a:ea typeface="Aptos" pitchFamily="34" charset="-122"/>
                 <a:cs typeface="Aptos" pitchFamily="34" charset="-120"/>
               </a:rPr>
-              <a:t>Streamlit UI + CLI + CSV/JSON артефакты + документация + воспроизводимый локальный запуск.</a:t>
+              <a:t>Рабочий Streamlit-интерфейс, CLI-запуск, выгрузки CSV/JSON, документация и воспроизводимый локальный проект.</a:t>
             </a:r>
             <a:endParaRPr lang="en-US" sz="1050" dirty="0"/>
           </a:p>
@@ -12700,7 +12700,7 @@
                 <a:ea typeface="Aptos" pitchFamily="34" charset="-122"/>
                 <a:cs typeface="Aptos" pitchFamily="34" charset="-120"/>
               </a:rPr>
-              <a:t>unit tests</a:t>
+              <a:t>теста</a:t>
             </a:r>
             <a:endParaRPr lang="en-US" sz="900" dirty="0"/>
           </a:p>
@@ -12778,7 +12778,7 @@
                 <a:ea typeface="Aptos" pitchFamily="34" charset="-122"/>
                 <a:cs typeface="Aptos" pitchFamily="34" charset="-120"/>
               </a:rPr>
-              <a:t>LLM providers</a:t>
+              <a:t>LLM-провайдера</a:t>
             </a:r>
             <a:endParaRPr lang="en-US" sz="900" dirty="0"/>
           </a:p>
@@ -12856,7 +12856,7 @@
                 <a:ea typeface="Aptos" pitchFamily="34" charset="-122"/>
                 <a:cs typeface="Aptos" pitchFamily="34" charset="-120"/>
               </a:rPr>
-              <a:t>data domains</a:t>
+              <a:t>типа данных</a:t>
             </a:r>
             <a:endParaRPr lang="en-US" sz="900" dirty="0"/>
           </a:p>
@@ -12934,7 +12934,7 @@
                 <a:ea typeface="Aptos" pitchFamily="34" charset="-122"/>
                 <a:cs typeface="Aptos" pitchFamily="34" charset="-120"/>
               </a:rPr>
-              <a:t>simple UI</a:t>
+              <a:t>простой интерфейс</a:t>
             </a:r>
             <a:endParaRPr lang="en-US" sz="900" dirty="0"/>
           </a:p>
@@ -13041,7 +13041,7 @@
                 <a:ea typeface="Aptos" pitchFamily="34" charset="-122"/>
                 <a:cs typeface="Aptos" pitchFamily="34" charset="-120"/>
               </a:rPr>
-              <a:t>TAKEAWAY</a:t>
+              <a:t>ВЫВОД</a:t>
             </a:r>
             <a:endParaRPr lang="en-US" sz="850" dirty="0"/>
           </a:p>
@@ -13244,7 +13244,7 @@
                 <a:ea typeface="Aptos" pitchFamily="34" charset="-122"/>
                 <a:cs typeface="Aptos" pitchFamily="34" charset="-120"/>
               </a:rPr>
-              <a:t>Simple UI</a:t>
+              <a:t>Простой UI</a:t>
             </a:r>
             <a:endParaRPr lang="en-US" sz="1000" dirty="0"/>
           </a:p>
@@ -13337,7 +13337,7 @@
                 <a:ea typeface="Aptos" pitchFamily="34" charset="-122"/>
                 <a:cs typeface="Aptos" pitchFamily="34" charset="-120"/>
               </a:rPr>
-              <a:t>Multi-agent trace</a:t>
+              <a:t>Путь агентов</a:t>
             </a:r>
             <a:endParaRPr lang="en-US" sz="1000" dirty="0"/>
           </a:p>
@@ -13430,7 +13430,7 @@
                 <a:ea typeface="Aptos" pitchFamily="34" charset="-122"/>
                 <a:cs typeface="Aptos" pitchFamily="34" charset="-120"/>
               </a:rPr>
-              <a:t>Validators</a:t>
+              <a:t>Проверки</a:t>
             </a:r>
             <a:endParaRPr lang="en-US" sz="1000" dirty="0"/>
           </a:p>
@@ -13616,7 +13616,7 @@
                 <a:ea typeface="Aptos" pitchFamily="34" charset="-122"/>
                 <a:cs typeface="Aptos" pitchFamily="34" charset="-120"/>
               </a:rPr>
-              <a:t>Clean CSV</a:t>
+              <a:t>Чистый CSV</a:t>
             </a:r>
             <a:endParaRPr lang="en-US" sz="1000" dirty="0"/>
           </a:p>
@@ -13855,7 +13855,7 @@
                 <a:ea typeface="Aptos" pitchFamily="34" charset="-122"/>
                 <a:cs typeface="Aptos" pitchFamily="34" charset="-120"/>
               </a:rPr>
-              <a:t>WHY IT MATTERS</a:t>
+              <a:t>ЗАЧЕМ ЭТО НУЖНО</a:t>
             </a:r>
             <a:endParaRPr lang="en-US" sz="850" dirty="0"/>
           </a:p>
@@ -13993,7 +13993,7 @@
                 <a:ea typeface="Aptos" pitchFamily="34" charset="-122"/>
                 <a:cs typeface="Aptos" pitchFamily="34" charset="-120"/>
               </a:rPr>
-              <a:t>PDF-статьи содержат нужные данные в тексте, таблицах, формулах и картинках.</a:t>
+              <a:t>В статьях нужные числа размазаны по тексту, таблицам, формулам и изображениям.</a:t>
             </a:r>
             <a:endParaRPr lang="en-US" sz="1400" dirty="0"/>
           </a:p>
@@ -14011,7 +14011,7 @@
                 <a:ea typeface="Aptos" pitchFamily="34" charset="-122"/>
                 <a:cs typeface="Aptos" pitchFamily="34" charset="-120"/>
               </a:rPr>
-              <a:t>LLM без валидаторов часто даёт синтаксически красивый, но химически неверный JSON.</a:t>
+              <a:t>Одна модель может красиво заполнить JSON, но ошибиться в SMILES, формуле или единицах измерения.</a:t>
             </a:r>
             <a:endParaRPr lang="en-US" sz="1400" dirty="0"/>
           </a:p>
@@ -14029,7 +14029,7 @@
                 <a:ea typeface="Aptos" pitchFamily="34" charset="-122"/>
                 <a:cs typeface="Aptos" pitchFamily="34" charset="-120"/>
               </a:rPr>
-              <a:t>Для соревнования важны не только строки CSV, но и воспроизводимая проверка качества.</a:t>
+              <a:t>Нужен не просто CSV, а результат, который можно быстро проверить и повторить.</a:t>
             </a:r>
             <a:endParaRPr lang="en-US" sz="1400" dirty="0"/>
           </a:p>
@@ -14047,7 +14047,7 @@
                 <a:ea typeface="Aptos" pitchFamily="34" charset="-122"/>
                 <a:cs typeface="Aptos" pitchFamily="34" charset="-120"/>
               </a:rPr>
-              <a:t>Пользователю нужно видеть, откуда взялась строка и почему часть строк отклонена.</a:t>
+              <a:t>Важно видеть не только принятые строки, но и то, что система отклонила.</a:t>
             </a:r>
             <a:endParaRPr lang="en-US" sz="1400" dirty="0"/>
           </a:p>
@@ -14206,7 +14206,7 @@
                 <a:ea typeface="Aptos" pitchFamily="34" charset="-122"/>
                 <a:cs typeface="Aptos" pitchFamily="34" charset="-120"/>
               </a:rPr>
-              <a:t>noise</a:t>
+              <a:t>шум</a:t>
             </a:r>
             <a:endParaRPr lang="en-US" sz="1000" dirty="0"/>
           </a:p>
@@ -14299,7 +14299,7 @@
                 <a:ea typeface="Aptos" pitchFamily="34" charset="-122"/>
                 <a:cs typeface="Aptos" pitchFamily="34" charset="-120"/>
               </a:rPr>
-              <a:t>missing units</a:t>
+              <a:t>нет unit</a:t>
             </a:r>
             <a:endParaRPr lang="en-US" sz="1000" dirty="0"/>
           </a:p>
@@ -14392,7 +14392,7 @@
                 <a:ea typeface="Aptos" pitchFamily="34" charset="-122"/>
                 <a:cs typeface="Aptos" pitchFamily="34" charset="-120"/>
               </a:rPr>
-              <a:t>bad formulas</a:t>
+              <a:t>плохая формула</a:t>
             </a:r>
             <a:endParaRPr lang="en-US" sz="1000" dirty="0"/>
           </a:p>
@@ -14485,7 +14485,7 @@
                 <a:ea typeface="Aptos" pitchFamily="34" charset="-122"/>
                 <a:cs typeface="Aptos" pitchFamily="34" charset="-120"/>
               </a:rPr>
-              <a:t>CSV risk</a:t>
+              <a:t>риск CSV</a:t>
             </a:r>
             <a:endParaRPr lang="en-US" sz="1000" dirty="0"/>
           </a:p>
@@ -14617,7 +14617,7 @@
                 <a:ea typeface="Aptos" pitchFamily="34" charset="-122"/>
                 <a:cs typeface="Aptos" pitchFamily="34" charset="-120"/>
               </a:rPr>
-              <a:t>Если не показывать evidence и rejected rows, невозможно быстро понять: ошибка в модели, в PDF-парсинге или в правилах валидации.</a:t>
+              <a:t>Без evidence и rejected rows трудно понять, где проблема: в модели, в PDF-парсинге или в правилах проверки.</a:t>
             </a:r>
             <a:endParaRPr lang="en-US" sz="1050" dirty="0"/>
           </a:p>
@@ -14724,7 +14724,7 @@
                 <a:ea typeface="Aptos" pitchFamily="34" charset="-122"/>
                 <a:cs typeface="Aptos" pitchFamily="34" charset="-120"/>
               </a:rPr>
-              <a:t>DOMAINS</a:t>
+              <a:t>ДАННЫЕ</a:t>
             </a:r>
             <a:endParaRPr lang="en-US" sz="850" dirty="0"/>
           </a:p>
@@ -14763,7 +14763,7 @@
                 <a:ea typeface="Aptos Display" pitchFamily="34" charset="-122"/>
                 <a:cs typeface="Aptos Display" pitchFamily="34" charset="-120"/>
               </a:rPr>
-              <a:t>Что извлекаем</a:t>
+              <a:t>С какими данными работает</a:t>
             </a:r>
             <a:endParaRPr lang="en-US" sz="2300" dirty="0"/>
           </a:p>
@@ -14915,7 +14915,7 @@
                 <a:ea typeface="Aptos" pitchFamily="34" charset="-122"/>
                 <a:cs typeface="Aptos" pitchFamily="34" charset="-120"/>
               </a:rPr>
-              <a:t>Small molecules</a:t>
+              <a:t>Малые молекулы</a:t>
             </a:r>
             <a:endParaRPr lang="en-US" sz="1300" dirty="0"/>
           </a:p>
@@ -14954,7 +14954,7 @@
                 <a:ea typeface="Aptos" pitchFamily="34" charset="-122"/>
                 <a:cs typeface="Aptos" pitchFamily="34" charset="-120"/>
               </a:rPr>
-              <a:t>Oxazolidinones / Benzimidazoles</a:t>
+              <a:t>Например Oxazolidinones / Benzimidazoles.</a:t>
             </a:r>
             <a:endParaRPr lang="en-US" sz="1050" dirty="0"/>
           </a:p>
@@ -14977,7 +14977,7 @@
                 <a:ea typeface="Aptos" pitchFamily="34" charset="-122"/>
                 <a:cs typeface="Aptos" pitchFamily="34" charset="-120"/>
               </a:rPr>
-              <a:t>Поля: compound_id, SMILES, canonical SMILES, property_name, value, unit.</a:t>
+              <a:t>Система извлекает compound id, SMILES, свойство, значение и unit.</a:t>
             </a:r>
             <a:endParaRPr lang="en-US" sz="1050" dirty="0"/>
           </a:p>
@@ -15000,7 +15000,7 @@
                 <a:ea typeface="Aptos" pitchFamily="34" charset="-122"/>
                 <a:cs typeface="Aptos" pitchFamily="34" charset="-120"/>
               </a:rPr>
-              <a:t>Валидатор: RDKit.</a:t>
+              <a:t>SMILES проверяется через RDKit.</a:t>
             </a:r>
             <a:endParaRPr lang="en-US" sz="1050" dirty="0"/>
           </a:p>
@@ -15093,7 +15093,7 @@
                 <a:ea typeface="Aptos" pitchFamily="34" charset="-122"/>
                 <a:cs typeface="Aptos" pitchFamily="34" charset="-120"/>
               </a:rPr>
-              <a:t>Nanozymes / Nanocatalysts</a:t>
+              <a:t>Наноматериалы и катализаторы</a:t>
             </a:r>
             <a:endParaRPr lang="en-US" sz="1300" dirty="0"/>
           </a:p>
@@ -15132,7 +15132,7 @@
                 <a:ea typeface="Aptos" pitchFamily="34" charset="-122"/>
                 <a:cs typeface="Aptos" pitchFamily="34" charset="-120"/>
               </a:rPr>
-              <a:t>Формулы и свойства материалов: size, diameter, Km, Vmax, yield, conversion, selectivity.</a:t>
+              <a:t>Формулы материалов и экспериментальные свойства: размеры, Km, Vmax, yield, conversion, selectivity.</a:t>
             </a:r>
             <a:endParaRPr lang="en-US" sz="1050" dirty="0"/>
           </a:p>
@@ -15155,7 +15155,7 @@
                 <a:ea typeface="Aptos" pitchFamily="34" charset="-122"/>
                 <a:cs typeface="Aptos" pitchFamily="34" charset="-120"/>
               </a:rPr>
-              <a:t>Валидаторы: formula sanity, physical sanity, property policy.</a:t>
+              <a:t>Проверяются формулы и физический смысл значений.</a:t>
             </a:r>
             <a:endParaRPr lang="en-US" sz="1050" dirty="0"/>
           </a:p>
@@ -15534,7 +15534,7 @@
                 <a:ea typeface="Aptos" pitchFamily="34" charset="-122"/>
                 <a:cs typeface="Aptos" pitchFamily="34" charset="-120"/>
               </a:rPr>
-              <a:t>USER FLOW</a:t>
+              <a:t>СЦЕНАРИЙ</a:t>
             </a:r>
             <a:endParaRPr lang="en-US" sz="850" dirty="0"/>
           </a:p>
@@ -15573,7 +15573,7 @@
                 <a:ea typeface="Aptos Display" pitchFamily="34" charset="-122"/>
                 <a:cs typeface="Aptos Display" pitchFamily="34" charset="-120"/>
               </a:rPr>
-              <a:t>Пользовательский сценарий</a:t>
+              <a:t>Как с этим работать</a:t>
             </a:r>
             <a:endParaRPr lang="en-US" sz="2300" dirty="0"/>
           </a:p>
@@ -15698,7 +15698,7 @@
                 <a:ea typeface="Aptos" pitchFamily="34" charset="-122"/>
                 <a:cs typeface="Aptos" pitchFamily="34" charset="-120"/>
               </a:rPr>
-              <a:t>1. Select domain</a:t>
+              <a:t>Выбрать домен</a:t>
             </a:r>
             <a:endParaRPr lang="en-US" sz="1000" dirty="0"/>
           </a:p>
@@ -15791,7 +15791,7 @@
                 <a:ea typeface="Aptos" pitchFamily="34" charset="-122"/>
                 <a:cs typeface="Aptos" pitchFamily="34" charset="-120"/>
               </a:rPr>
-              <a:t>2. Upload PDF</a:t>
+              <a:t>Загрузить PDF</a:t>
             </a:r>
             <a:endParaRPr lang="en-US" sz="1000" dirty="0"/>
           </a:p>
@@ -15884,7 +15884,7 @@
                 <a:ea typeface="Aptos" pitchFamily="34" charset="-122"/>
                 <a:cs typeface="Aptos" pitchFamily="34" charset="-120"/>
               </a:rPr>
-              <a:t>3. Choose extractor</a:t>
+              <a:t>Выбрать модель</a:t>
             </a:r>
             <a:endParaRPr lang="en-US" sz="1000" dirty="0"/>
           </a:p>
@@ -15977,7 +15977,7 @@
                 <a:ea typeface="Aptos" pitchFamily="34" charset="-122"/>
                 <a:cs typeface="Aptos" pitchFamily="34" charset="-120"/>
               </a:rPr>
-              <a:t>4. Add API key</a:t>
+              <a:t>Добавить ключ</a:t>
             </a:r>
             <a:endParaRPr lang="en-US" sz="1000" dirty="0"/>
           </a:p>
@@ -16070,7 +16070,7 @@
                 <a:ea typeface="Aptos" pitchFamily="34" charset="-122"/>
                 <a:cs typeface="Aptos" pitchFamily="34" charset="-120"/>
               </a:rPr>
-              <a:t>5. Run</a:t>
+              <a:t>Нажать Run</a:t>
             </a:r>
             <a:endParaRPr lang="en-US" sz="1000" dirty="0"/>
           </a:p>
@@ -16202,7 +16202,7 @@
                 <a:ea typeface="Aptos" pitchFamily="34" charset="-122"/>
                 <a:cs typeface="Aptos" pitchFamily="34" charset="-120"/>
               </a:rPr>
-              <a:t>Обычный сценарий укладывается в четыре шага: домен, PDF, extractor, Run. Дополнительные параметры спрятаны в Advanced.</a:t>
+              <a:t>Пользователь делает несколько понятных шагов. Тонкие настройки спрятаны в Advanced и не мешают основному сценарию.</a:t>
             </a:r>
             <a:endParaRPr lang="en-US" sz="1050" dirty="0"/>
           </a:p>
@@ -16295,7 +16295,7 @@
                 <a:ea typeface="Aptos" pitchFamily="34" charset="-122"/>
                 <a:cs typeface="Aptos" pitchFamily="34" charset="-120"/>
               </a:rPr>
-              <a:t>API без боли</a:t>
+              <a:t>Ключи без настройки системы</a:t>
             </a:r>
             <a:endParaRPr lang="en-US" sz="1300" dirty="0"/>
           </a:p>
@@ -16334,7 +16334,7 @@
                 <a:ea typeface="Aptos" pitchFamily="34" charset="-122"/>
                 <a:cs typeface="Aptos" pitchFamily="34" charset="-120"/>
               </a:rPr>
-              <a:t>Ключ можно вставить прямо в UI на один запуск или положить в `.env`. Секреты не попадают в git.</a:t>
+              <a:t>API-ключ можно вставить прямо в интерфейс на один запуск или положить в `.env`. В репозиторий секреты не попадают.</a:t>
             </a:r>
             <a:endParaRPr lang="en-US" sz="1050" dirty="0"/>
           </a:p>
@@ -16427,7 +16427,7 @@
                 <a:ea typeface="Aptos" pitchFamily="34" charset="-122"/>
                 <a:cs typeface="Aptos" pitchFamily="34" charset="-120"/>
               </a:rPr>
-              <a:t>Проверяемость</a:t>
+              <a:t>После запуска всё видно</a:t>
             </a:r>
             <a:endParaRPr lang="en-US" sz="1300" dirty="0"/>
           </a:p>
@@ -16466,7 +16466,7 @@
                 <a:ea typeface="Aptos" pitchFamily="34" charset="-122"/>
                 <a:cs typeface="Aptos" pitchFamily="34" charset="-120"/>
               </a:rPr>
-              <a:t>После запуска сразу видны clean rows, rejected rows, conflicts, evidence, agent trace и логи.</a:t>
+              <a:t>Итоговая таблица, отклонённые строки, конфликты, evidence, путь агентов и технический лог доступны в отдельных вкладках.</a:t>
             </a:r>
             <a:endParaRPr lang="en-US" sz="1050" dirty="0"/>
           </a:p>
@@ -16573,7 +16573,7 @@
                 <a:ea typeface="Aptos" pitchFamily="34" charset="-122"/>
                 <a:cs typeface="Aptos" pitchFamily="34" charset="-120"/>
               </a:rPr>
-              <a:t>PIPELINE</a:t>
+              <a:t>КАК УСТРОЕНО</a:t>
             </a:r>
             <a:endParaRPr lang="en-US" sz="850" dirty="0"/>
           </a:p>
@@ -16737,7 +16737,7 @@
                 <a:ea typeface="Aptos" pitchFamily="34" charset="-122"/>
                 <a:cs typeface="Aptos" pitchFamily="34" charset="-120"/>
               </a:rPr>
-              <a:t>PDF parser</a:t>
+              <a:t>Читаем PDF</a:t>
             </a:r>
             <a:endParaRPr lang="en-US" sz="1000" dirty="0"/>
           </a:p>
@@ -16830,7 +16830,7 @@
                 <a:ea typeface="Aptos" pitchFamily="34" charset="-122"/>
                 <a:cs typeface="Aptos" pitchFamily="34" charset="-120"/>
               </a:rPr>
-              <a:t>Text cleanup</a:t>
+              <a:t>Чистим текст</a:t>
             </a:r>
             <a:endParaRPr lang="en-US" sz="1000" dirty="0"/>
           </a:p>
@@ -16923,7 +16923,7 @@
                 <a:ea typeface="Aptos" pitchFamily="34" charset="-122"/>
                 <a:cs typeface="Aptos" pitchFamily="34" charset="-120"/>
               </a:rPr>
-              <a:t>Chunking</a:t>
+              <a:t>Режем на чанки</a:t>
             </a:r>
             <a:endParaRPr lang="en-US" sz="1000" dirty="0"/>
           </a:p>
@@ -17016,7 +17016,7 @@
                 <a:ea typeface="Aptos" pitchFamily="34" charset="-122"/>
                 <a:cs typeface="Aptos" pitchFamily="34" charset="-120"/>
               </a:rPr>
-              <a:t>Retrieval</a:t>
+              <a:t>Выбираем важное</a:t>
             </a:r>
             <a:endParaRPr lang="en-US" sz="1000" dirty="0"/>
           </a:p>
@@ -17109,7 +17109,7 @@
                 <a:ea typeface="Aptos" pitchFamily="34" charset="-122"/>
                 <a:cs typeface="Aptos" pitchFamily="34" charset="-120"/>
               </a:rPr>
-              <a:t>Extractor</a:t>
+              <a:t>Извлекаем</a:t>
             </a:r>
             <a:endParaRPr lang="en-US" sz="1000" dirty="0"/>
           </a:p>
@@ -17202,7 +17202,7 @@
                 <a:ea typeface="Aptos" pitchFamily="34" charset="-122"/>
                 <a:cs typeface="Aptos" pitchFamily="34" charset="-120"/>
               </a:rPr>
-              <a:t>Validator</a:t>
+              <a:t>Проверяем</a:t>
             </a:r>
             <a:endParaRPr lang="en-US" sz="1000" dirty="0"/>
           </a:p>
@@ -17295,7 +17295,7 @@
                 <a:ea typeface="Aptos" pitchFamily="34" charset="-122"/>
                 <a:cs typeface="Aptos" pitchFamily="34" charset="-120"/>
               </a:rPr>
-              <a:t>Aggregation</a:t>
+              <a:t>Собираем CSV</a:t>
             </a:r>
             <a:endParaRPr lang="en-US" sz="1000" dirty="0"/>
           </a:p>
@@ -17388,7 +17388,7 @@
                 <a:ea typeface="Aptos" pitchFamily="34" charset="-122"/>
                 <a:cs typeface="Aptos" pitchFamily="34" charset="-120"/>
               </a:rPr>
-              <a:t>Parser</a:t>
+              <a:t>Чтение PDF</a:t>
             </a:r>
             <a:endParaRPr lang="en-US" sz="1300" dirty="0"/>
           </a:p>
@@ -17427,7 +17427,7 @@
                 <a:ea typeface="Aptos" pitchFamily="34" charset="-122"/>
                 <a:cs typeface="Aptos" pitchFamily="34" charset="-120"/>
               </a:rPr>
-              <a:t>Docling/Camelot превращают PDF в Markdown, таблицы и warnings.</a:t>
+              <a:t>Docling/Camelot достают текст, таблицы и предупреждения о проблемах парсинга.</a:t>
             </a:r>
             <a:endParaRPr lang="en-US" sz="1050" dirty="0"/>
           </a:p>
@@ -17520,7 +17520,7 @@
                 <a:ea typeface="Aptos" pitchFamily="34" charset="-122"/>
                 <a:cs typeface="Aptos" pitchFamily="34" charset="-120"/>
               </a:rPr>
-              <a:t>Retrieval</a:t>
+              <a:t>Выбор контекста</a:t>
             </a:r>
             <a:endParaRPr lang="en-US" sz="1300" dirty="0"/>
           </a:p>
@@ -17559,7 +17559,7 @@
                 <a:ea typeface="Aptos" pitchFamily="34" charset="-122"/>
                 <a:cs typeface="Aptos" pitchFamily="34" charset="-120"/>
               </a:rPr>
-              <a:t>TF-IDF или HF embeddings выбирают наиболее полезные чанки.</a:t>
+              <a:t>Retrieval выбирает куски статьи, где с высокой вероятностью есть нужные значения.</a:t>
             </a:r>
             <a:endParaRPr lang="en-US" sz="1050" dirty="0"/>
           </a:p>
@@ -17652,7 +17652,7 @@
                 <a:ea typeface="Aptos" pitchFamily="34" charset="-122"/>
                 <a:cs typeface="Aptos" pitchFamily="34" charset="-120"/>
               </a:rPr>
-              <a:t>Extraction</a:t>
+              <a:t>Извлечение</a:t>
             </a:r>
             <a:endParaRPr lang="en-US" sz="1300" dirty="0"/>
           </a:p>
@@ -17691,7 +17691,7 @@
                 <a:ea typeface="Aptos" pitchFamily="34" charset="-122"/>
                 <a:cs typeface="Aptos" pitchFamily="34" charset="-120"/>
               </a:rPr>
-              <a:t>LLM возвращает structured rows по Pydantic schema.</a:t>
+              <a:t>Модель возвращает строки в строгом формате, чтобы их можно было проверить программно.</a:t>
             </a:r>
             <a:endParaRPr lang="en-US" sz="1050" dirty="0"/>
           </a:p>
@@ -17784,7 +17784,7 @@
                 <a:ea typeface="Aptos" pitchFamily="34" charset="-122"/>
                 <a:cs typeface="Aptos" pitchFamily="34" charset="-120"/>
               </a:rPr>
-              <a:t>Aggregation</a:t>
+              <a:t>Сборка результата</a:t>
             </a:r>
             <a:endParaRPr lang="en-US" sz="1300" dirty="0"/>
           </a:p>
@@ -17823,7 +17823,7 @@
                 <a:ea typeface="Aptos" pitchFamily="34" charset="-122"/>
                 <a:cs typeface="Aptos" pitchFamily="34" charset="-120"/>
               </a:rPr>
-              <a:t>Pandas дедуплицирует, решает конфликты и готовит CSV.</a:t>
+              <a:t>Pandas убирает дубли, решает конфликты и готовит итоговые таблицы.</a:t>
             </a:r>
             <a:endParaRPr lang="en-US" sz="1050" dirty="0"/>
           </a:p>
@@ -17862,7 +17862,7 @@
                 <a:ea typeface="Aptos" pitchFamily="34" charset="-122"/>
                 <a:cs typeface="Aptos" pitchFamily="34" charset="-120"/>
               </a:rPr>
-              <a:t>Идея: LLM не является единственным источником истины. Каждый шаг пишет trace и отдаёт данные Python-валидаторам.</a:t>
+              <a:t>Главный принцип: модель не является последней инстанцией. Каждая строка проходит проверку и оставляет след.</a:t>
             </a:r>
             <a:endParaRPr lang="en-US" sz="1700" dirty="0"/>
           </a:p>
@@ -17969,7 +17969,7 @@
                 <a:ea typeface="Aptos" pitchFamily="34" charset="-122"/>
                 <a:cs typeface="Aptos" pitchFamily="34" charset="-120"/>
               </a:rPr>
-              <a:t>AGENTS</a:t>
+              <a:t>КТО ЧТО ДЕЛАЕТ</a:t>
             </a:r>
             <a:endParaRPr lang="en-US" sz="850" dirty="0"/>
           </a:p>
@@ -18008,7 +18008,7 @@
                 <a:ea typeface="Aptos Display" pitchFamily="34" charset="-122"/>
                 <a:cs typeface="Aptos Display" pitchFamily="34" charset="-120"/>
               </a:rPr>
-              <a:t>Multi-agent система</a:t>
+              <a:t>Система агентов</a:t>
             </a:r>
             <a:endParaRPr lang="en-US" sz="2300" dirty="0"/>
           </a:p>
@@ -18199,7 +18199,7 @@
                 <a:ea typeface="Aptos" pitchFamily="34" charset="-122"/>
                 <a:cs typeface="Aptos" pitchFamily="34" charset="-120"/>
               </a:rPr>
-              <a:t>PDF -&gt; Markdown, tables, chunks</a:t>
+              <a:t>читает PDF и готовит текст</a:t>
             </a:r>
             <a:endParaRPr lang="en-US" sz="1000" dirty="0"/>
           </a:p>
@@ -18331,7 +18331,7 @@
                 <a:ea typeface="Aptos" pitchFamily="34" charset="-122"/>
                 <a:cs typeface="Aptos" pitchFamily="34" charset="-120"/>
               </a:rPr>
-              <a:t>выбор домена и extraction graph</a:t>
+              <a:t>выбирает нужный сценарий</a:t>
             </a:r>
             <a:endParaRPr lang="en-US" sz="1000" dirty="0"/>
           </a:p>
@@ -18463,7 +18463,7 @@
                 <a:ea typeface="Aptos" pitchFamily="34" charset="-122"/>
                 <a:cs typeface="Aptos" pitchFamily="34" charset="-120"/>
               </a:rPr>
-              <a:t>ranking релевантных чанков</a:t>
+              <a:t>находит важные фрагменты</a:t>
             </a:r>
             <a:endParaRPr lang="en-US" sz="1000" dirty="0"/>
           </a:p>
@@ -18595,7 +18595,7 @@
                 <a:ea typeface="Aptos" pitchFamily="34" charset="-122"/>
                 <a:cs typeface="Aptos" pitchFamily="34" charset="-120"/>
               </a:rPr>
-              <a:t>LLM extraction + retry loop</a:t>
+              <a:t>извлекает и перепроверяет строки</a:t>
             </a:r>
             <a:endParaRPr lang="en-US" sz="1000" dirty="0"/>
           </a:p>
@@ -18727,7 +18727,7 @@
                 <a:ea typeface="Aptos" pitchFamily="34" charset="-122"/>
                 <a:cs typeface="Aptos" pitchFamily="34" charset="-120"/>
               </a:rPr>
-              <a:t>панели, scale bar, частицы</a:t>
+              <a:t>работает с картинками и scale bar</a:t>
             </a:r>
             <a:endParaRPr lang="en-US" sz="1000" dirty="0"/>
           </a:p>
@@ -18859,7 +18859,7 @@
                 <a:ea typeface="Aptos" pitchFamily="34" charset="-122"/>
                 <a:cs typeface="Aptos" pitchFamily="34" charset="-120"/>
               </a:rPr>
-              <a:t>clean / rejected / conflicts</a:t>
+              <a:t>собирает финальные таблицы</a:t>
             </a:r>
             <a:endParaRPr lang="en-US" sz="1000" dirty="0"/>
           </a:p>
@@ -18898,7 +18898,7 @@
                 <a:ea typeface="Aptos" pitchFamily="34" charset="-122"/>
                 <a:cs typeface="Aptos" pitchFamily="34" charset="-120"/>
               </a:rPr>
-              <a:t>В UI это видно во вкладке Agents: агент, статус, summary, metrics и warnings.</a:t>
+              <a:t>Вкладка Agents показывает, какой этап что сделал, где были предупреждения и сколько данных прошло дальше.</a:t>
             </a:r>
             <a:endParaRPr lang="en-US" sz="1600" dirty="0"/>
           </a:p>
@@ -19005,7 +19005,7 @@
                 <a:ea typeface="Aptos" pitchFamily="34" charset="-122"/>
                 <a:cs typeface="Aptos" pitchFamily="34" charset="-120"/>
               </a:rPr>
-              <a:t>LANGGRAPH LOOP</a:t>
+              <a:t>ЦИКЛ ПРОВЕРКИ</a:t>
             </a:r>
             <a:endParaRPr lang="en-US" sz="850" dirty="0"/>
           </a:p>
@@ -19169,7 +19169,7 @@
                 <a:ea typeface="Aptos" pitchFamily="34" charset="-122"/>
                 <a:cs typeface="Aptos" pitchFamily="34" charset="-120"/>
               </a:rPr>
-              <a:t>Chunk</a:t>
+              <a:t>Чанк</a:t>
             </a:r>
             <a:endParaRPr lang="en-US" sz="1000" dirty="0"/>
           </a:p>
@@ -19262,7 +19262,7 @@
                 <a:ea typeface="Aptos" pitchFamily="34" charset="-122"/>
                 <a:cs typeface="Aptos" pitchFamily="34" charset="-120"/>
               </a:rPr>
-              <a:t>LLM extractor</a:t>
+              <a:t>Модель</a:t>
             </a:r>
             <a:endParaRPr lang="en-US" sz="1000" dirty="0"/>
           </a:p>
@@ -19355,7 +19355,7 @@
                 <a:ea typeface="Aptos" pitchFamily="34" charset="-122"/>
                 <a:cs typeface="Aptos" pitchFamily="34" charset="-120"/>
               </a:rPr>
-              <a:t>Pydantic schema</a:t>
+              <a:t>Строгая схема</a:t>
             </a:r>
             <a:endParaRPr lang="en-US" sz="1000" dirty="0"/>
           </a:p>
@@ -19448,7 +19448,7 @@
                 <a:ea typeface="Aptos" pitchFamily="34" charset="-122"/>
                 <a:cs typeface="Aptos" pitchFamily="34" charset="-120"/>
               </a:rPr>
-              <a:t>Python critic</a:t>
+              <a:t>Python-проверка</a:t>
             </a:r>
             <a:endParaRPr lang="en-US" sz="1000" dirty="0"/>
           </a:p>
@@ -19541,7 +19541,7 @@
                 <a:ea typeface="Aptos" pitchFamily="34" charset="-122"/>
                 <a:cs typeface="Aptos" pitchFamily="34" charset="-120"/>
               </a:rPr>
-              <a:t>Retry or Done</a:t>
+              <a:t>Повтор или готово</a:t>
             </a:r>
             <a:endParaRPr lang="en-US" sz="1000" dirty="0"/>
           </a:p>
@@ -19890,7 +19890,7 @@
                 <a:ea typeface="Aptos" pitchFamily="34" charset="-122"/>
                 <a:cs typeface="Aptos" pitchFamily="34" charset="-120"/>
               </a:rPr>
-              <a:t>Retry limit: до 3 попыток на чанк. Ошибки валидации добавляются в следующий prompt.</a:t>
+              <a:t>Если проверка нашла ошибку, система даёт модели ещё одну попытку и прямо сообщает, что нужно исправить.</a:t>
             </a:r>
             <a:endParaRPr lang="en-US" sz="1400" dirty="0"/>
           </a:p>
@@ -19997,7 +19997,7 @@
                 <a:ea typeface="Aptos" pitchFamily="34" charset="-122"/>
                 <a:cs typeface="Aptos" pitchFamily="34" charset="-120"/>
               </a:rPr>
-              <a:t>CONTEXT SELECTION</a:t>
+              <a:t>МЕНЬШЕ ШУМА</a:t>
             </a:r>
             <a:endParaRPr lang="en-US" sz="850" dirty="0"/>
           </a:p>
@@ -20036,7 +20036,7 @@
                 <a:ea typeface="Aptos Display" pitchFamily="34" charset="-122"/>
                 <a:cs typeface="Aptos Display" pitchFamily="34" charset="-120"/>
               </a:rPr>
-              <a:t>Retrieval: меньше шума для модели</a:t>
+              <a:t>Как выбирается контекст</a:t>
             </a:r>
             <a:endParaRPr lang="en-US" sz="2300" dirty="0"/>
           </a:p>
@@ -20227,7 +20227,7 @@
                 <a:ea typeface="Aptos" pitchFamily="34" charset="-122"/>
                 <a:cs typeface="Aptos" pitchFamily="34" charset="-120"/>
               </a:rPr>
-              <a:t>Быстро и локально. Хороший default для демо и воспроизводимости.</a:t>
+              <a:t>Быстрый локальный вариант. Хорошо подходит как стабильный default.</a:t>
             </a:r>
             <a:endParaRPr lang="en-US" sz="1050" dirty="0"/>
           </a:p>
@@ -20320,7 +20320,7 @@
                 <a:ea typeface="Aptos" pitchFamily="34" charset="-122"/>
                 <a:cs typeface="Aptos" pitchFamily="34" charset="-120"/>
               </a:rPr>
-              <a:t>Hybrid HF embeddings</a:t>
+              <a:t>HF embeddings</a:t>
             </a:r>
             <a:endParaRPr lang="en-US" sz="1300" dirty="0"/>
           </a:p>
@@ -20359,7 +20359,7 @@
                 <a:ea typeface="Aptos" pitchFamily="34" charset="-122"/>
                 <a:cs typeface="Aptos" pitchFamily="34" charset="-120"/>
               </a:rPr>
-              <a:t>Использует HF feature extraction, если есть HF_TOKEN. Даёт semantic ranking.</a:t>
+              <a:t>Если есть HF_TOKEN, можно включить семантический поиск по смыслу, а не только по словам.</a:t>
             </a:r>
             <a:endParaRPr lang="en-US" sz="1050" dirty="0"/>
           </a:p>
@@ -20452,7 +20452,7 @@
                 <a:ea typeface="Aptos" pitchFamily="34" charset="-122"/>
                 <a:cs typeface="Aptos" pitchFamily="34" charset="-120"/>
               </a:rPr>
-              <a:t>UI trace</a:t>
+              <a:t>Прозрачность</a:t>
             </a:r>
             <a:endParaRPr lang="en-US" sz="1300" dirty="0"/>
           </a:p>
@@ -20491,7 +20491,7 @@
                 <a:ea typeface="Aptos" pitchFamily="34" charset="-122"/>
                 <a:cs typeface="Aptos" pitchFamily="34" charset="-120"/>
               </a:rPr>
-              <a:t>Во вкладке Chunks видно selected, rank, score, method и preview.</a:t>
+              <a:t>Во вкладке Chunks видно, какие фрагменты выбраны и почему они попали в обработку.</a:t>
             </a:r>
             <a:endParaRPr lang="en-US" sz="1050" dirty="0"/>
           </a:p>
@@ -20557,7 +20557,7 @@
                 <a:ea typeface="Aptos" pitchFamily="34" charset="-122"/>
                 <a:cs typeface="Aptos" pitchFamily="34" charset="-120"/>
               </a:rPr>
-              <a:t>All chunks</a:t>
+              <a:t>Все чанки</a:t>
             </a:r>
             <a:endParaRPr lang="en-US" sz="1000" dirty="0"/>
           </a:p>
@@ -20650,7 +20650,7 @@
                 <a:ea typeface="Aptos" pitchFamily="34" charset="-122"/>
                 <a:cs typeface="Aptos" pitchFamily="34" charset="-120"/>
               </a:rPr>
-              <a:t>ranked chunks</a:t>
+              <a:t>оценка</a:t>
             </a:r>
             <a:endParaRPr lang="en-US" sz="1000" dirty="0"/>
           </a:p>
@@ -20836,7 +20836,7 @@
                 <a:ea typeface="Aptos" pitchFamily="34" charset="-122"/>
                 <a:cs typeface="Aptos" pitchFamily="34" charset="-120"/>
               </a:rPr>
-              <a:t>LLM input</a:t>
+              <a:t>вход модели</a:t>
             </a:r>
             <a:endParaRPr lang="en-US" sz="1000" dirty="0"/>
           </a:p>
@@ -20875,7 +20875,7 @@
                 <a:ea typeface="Aptos" pitchFamily="34" charset="-122"/>
                 <a:cs typeface="Aptos" pitchFamily="34" charset="-120"/>
               </a:rPr>
-              <a:t>Зачем: LLM получает не всю статью, а наиболее вероятные разделы с результатами, таблицами и экспериментом.</a:t>
+              <a:t>Зачем: модель читает не всю статью подряд, а наиболее вероятные места с результатами, таблицами и экспериментом.</a:t>
             </a:r>
             <a:endParaRPr lang="en-US" sz="1500" dirty="0"/>
           </a:p>
